--- a/assets/figures-editable/c3-c4/c4-e10.pptx
+++ b/assets/figures-editable/c3-c4/c4-e10.pptx
@@ -3104,8 +3104,8 @@
         </p:nvSpPr>
         <p:spPr>
           <a:xfrm>
-            <a:off x="274320" y="137160"/>
-            <a:ext cx="11612880" cy="365760"/>
+            <a:off x="274320" y="118872"/>
+            <a:ext cx="11612880" cy="340105"/>
           </a:xfrm>
           <a:prstGeom prst="rect">
             <a:avLst/>
@@ -3114,7 +3114,7 @@
           <a:effectLst/>
         </p:spPr>
         <p:txBody>
-          <a:bodyPr wrap="square" lIns="27432" rIns="27432" tIns="18288" bIns="18288" anchor="ctr">
+          <a:bodyPr wrap="none" lIns="18288" rIns="18288" tIns="18288" bIns="18288" anchor="t">
             <a:spAutoFit/>
           </a:bodyPr>
           <a:lstStyle/>
@@ -3125,7 +3125,7 @@
               </a:spcAft>
             </a:pPr>
             <a:r>
-              <a:rPr sz="2100" b="0" i="0">
+              <a:rPr sz="1900" b="1" i="0">
                 <a:solidFill>
                   <a:srgbClr val="8EDBD4"/>
                 </a:solidFill>
@@ -3138,24 +3138,528 @@
       </p:sp>
       <p:sp>
         <p:nvSpPr>
-          <p:cNvPr id="3" name="C4-E10 rect 1" descr="sci-ppt:o001"/>
+          <p:cNvPr id="3" name="C4-E10 text 1" descr="sci-ppt:o001"/>
+          <p:cNvSpPr txBox="1"/>
+          <p:nvPr/>
+        </p:nvSpPr>
+        <p:spPr>
+          <a:xfrm>
+            <a:off x="457200" y="914400"/>
+            <a:ext cx="11247120" cy="254889"/>
+          </a:xfrm>
+          <a:prstGeom prst="rect">
+            <a:avLst/>
+          </a:prstGeom>
+          <a:noFill/>
+          <a:effectLst/>
+        </p:spPr>
+        <p:txBody>
+          <a:bodyPr wrap="none" lIns="18288" rIns="18288" tIns="18288" bIns="18288" anchor="t">
+            <a:spAutoFit/>
+          </a:bodyPr>
+          <a:lstStyle/>
+          <a:p>
+            <a:pPr algn="l">
+              <a:spcAft>
+                <a:spcPts val="0"/>
+              </a:spcAft>
+            </a:pPr>
+            <a:r>
+              <a:rPr sz="1350" b="1" i="0">
+                <a:solidFill>
+                  <a:srgbClr val="8EDBD4"/>
+                </a:solidFill>
+                <a:latin typeface="Arial"/>
+              </a:rPr>
+              <a:t>Compare the pulse with three response times</a:t>
+            </a:r>
+          </a:p>
+        </p:txBody>
+      </p:sp>
+      <p:sp>
+        <p:nvSpPr>
+          <p:cNvPr id="4" name="C4-E10 text 2" descr="sci-ppt:o002"/>
+          <p:cNvSpPr txBox="1"/>
+          <p:nvPr/>
+        </p:nvSpPr>
+        <p:spPr>
+          <a:xfrm>
+            <a:off x="457200" y="1481328"/>
+            <a:ext cx="4846320" cy="239395"/>
+          </a:xfrm>
+          <a:prstGeom prst="rect">
+            <a:avLst/>
+          </a:prstGeom>
+          <a:noFill/>
+          <a:effectLst/>
+        </p:spPr>
+        <p:txBody>
+          <a:bodyPr wrap="none" lIns="18288" rIns="18288" tIns="18288" bIns="18288" anchor="t">
+            <a:spAutoFit/>
+          </a:bodyPr>
+          <a:lstStyle/>
+          <a:p>
+            <a:pPr algn="l">
+              <a:spcAft>
+                <a:spcPts val="0"/>
+              </a:spcAft>
+            </a:pPr>
+            <a:r>
+              <a:rPr sz="1250" b="0" i="0">
+                <a:solidFill>
+                  <a:srgbClr val="E7F0F3"/>
+                </a:solidFill>
+                <a:latin typeface="Arial"/>
+              </a:rPr>
+              <a:t>t_b = a_f² √(m_A/D_f)  (bending)</a:t>
+            </a:r>
+          </a:p>
+        </p:txBody>
+      </p:sp>
+      <p:sp>
+        <p:nvSpPr>
+          <p:cNvPr id="5" name="C4-E10 rect 3" descr="sci-ppt:o003"/>
           <p:cNvSpPr/>
           <p:nvPr/>
         </p:nvSpPr>
         <p:spPr>
           <a:xfrm>
-            <a:off x="594360" y="1417320"/>
-            <a:ext cx="3200400" cy="1325880"/>
+            <a:off x="5394960" y="1463040"/>
+            <a:ext cx="2970896" cy="457200"/>
           </a:xfrm>
           <a:prstGeom prst="rect">
+            <a:avLst/>
+          </a:prstGeom>
+          <a:solidFill>
+            <a:srgbClr val="F2B880">
+              <a:alpha val="85000"/>
+            </a:srgbClr>
+          </a:solidFill>
+          <a:ln w="12700">
+            <a:solidFill>
+              <a:srgbClr val="F2B880">
+                <a:alpha val="85000"/>
+              </a:srgbClr>
+            </a:solidFill>
+          </a:ln>
+          <a:effectLst/>
+        </p:spPr>
+        <p:txBody>
+          <a:bodyPr rtlCol="0" anchor="ctr"/>
+          <a:lstStyle/>
+          <a:p>
+            <a:pPr algn="ctr"/>
+          </a:p>
+        </p:txBody>
+      </p:sp>
+      <p:sp>
+        <p:nvSpPr>
+          <p:cNvPr id="6" name="C4-E10 text 4" descr="sci-ppt:o004"/>
+          <p:cNvSpPr txBox="1"/>
+          <p:nvPr/>
+        </p:nvSpPr>
+        <p:spPr>
+          <a:xfrm>
+            <a:off x="8439008" y="1508760"/>
+            <a:ext cx="1371600" cy="239395"/>
+          </a:xfrm>
+          <a:prstGeom prst="rect">
+            <a:avLst/>
+          </a:prstGeom>
+          <a:noFill/>
+          <a:effectLst/>
+        </p:spPr>
+        <p:txBody>
+          <a:bodyPr wrap="none" lIns="18288" rIns="18288" tIns="18288" bIns="18288" anchor="t">
+            <a:spAutoFit/>
+          </a:bodyPr>
+          <a:lstStyle/>
+          <a:p>
+            <a:pPr algn="l">
+              <a:spcAft>
+                <a:spcPts val="0"/>
+              </a:spcAft>
+            </a:pPr>
+            <a:r>
+              <a:rPr sz="1250" b="1" i="0">
+                <a:solidFill>
+                  <a:srgbClr val="E7F0F3"/>
+                </a:solidFill>
+                <a:latin typeface="Arial"/>
+              </a:rPr>
+              <a:t>3.5e+03 ns</a:t>
+            </a:r>
+          </a:p>
+        </p:txBody>
+      </p:sp>
+      <p:sp>
+        <p:nvSpPr>
+          <p:cNvPr id="7" name="C4-E10 text 5" descr="sci-ppt:o005"/>
+          <p:cNvSpPr txBox="1"/>
+          <p:nvPr/>
+        </p:nvSpPr>
+        <p:spPr>
+          <a:xfrm>
+            <a:off x="457200" y="2212848"/>
+            <a:ext cx="4846320" cy="239395"/>
+          </a:xfrm>
+          <a:prstGeom prst="rect">
+            <a:avLst/>
+          </a:prstGeom>
+          <a:noFill/>
+          <a:effectLst/>
+        </p:spPr>
+        <p:txBody>
+          <a:bodyPr wrap="none" lIns="18288" rIns="18288" tIns="18288" bIns="18288" anchor="t">
+            <a:spAutoFit/>
+          </a:bodyPr>
+          <a:lstStyle/>
+          <a:p>
+            <a:pPr algn="l">
+              <a:spcAft>
+                <a:spcPts val="0"/>
+              </a:spcAft>
+            </a:pPr>
+            <a:r>
+              <a:rPr sz="1250" b="0" i="0">
+                <a:solidFill>
+                  <a:srgbClr val="E7F0F3"/>
+                </a:solidFill>
+                <a:latin typeface="Arial"/>
+              </a:rPr>
+              <a:t>t_T = a_f √(m_A/T₀)  (tension, T₀ = 1 N/m)</a:t>
+            </a:r>
+          </a:p>
+        </p:txBody>
+      </p:sp>
+      <p:sp>
+        <p:nvSpPr>
+          <p:cNvPr id="8" name="C4-E10 rect 6" descr="sci-ppt:o006"/>
+          <p:cNvSpPr/>
+          <p:nvPr/>
+        </p:nvSpPr>
+        <p:spPr>
+          <a:xfrm>
+            <a:off x="5394960" y="2194560"/>
+            <a:ext cx="3506758" cy="457200"/>
+          </a:xfrm>
+          <a:prstGeom prst="rect">
+            <a:avLst/>
+          </a:prstGeom>
+          <a:solidFill>
+            <a:srgbClr val="7FC8F8">
+              <a:alpha val="85000"/>
+            </a:srgbClr>
+          </a:solidFill>
+          <a:ln w="12700">
+            <a:solidFill>
+              <a:srgbClr val="7FC8F8">
+                <a:alpha val="85000"/>
+              </a:srgbClr>
+            </a:solidFill>
+          </a:ln>
+          <a:effectLst/>
+        </p:spPr>
+        <p:txBody>
+          <a:bodyPr rtlCol="0" anchor="ctr"/>
+          <a:lstStyle/>
+          <a:p>
+            <a:pPr algn="ctr"/>
+          </a:p>
+        </p:txBody>
+      </p:sp>
+      <p:sp>
+        <p:nvSpPr>
+          <p:cNvPr id="9" name="C4-E10 text 7" descr="sci-ppt:o007"/>
+          <p:cNvSpPr txBox="1"/>
+          <p:nvPr/>
+        </p:nvSpPr>
+        <p:spPr>
+          <a:xfrm>
+            <a:off x="8974870" y="2240280"/>
+            <a:ext cx="1371600" cy="239395"/>
+          </a:xfrm>
+          <a:prstGeom prst="rect">
+            <a:avLst/>
+          </a:prstGeom>
+          <a:noFill/>
+          <a:effectLst/>
+        </p:spPr>
+        <p:txBody>
+          <a:bodyPr wrap="none" lIns="18288" rIns="18288" tIns="18288" bIns="18288" anchor="t">
+            <a:spAutoFit/>
+          </a:bodyPr>
+          <a:lstStyle/>
+          <a:p>
+            <a:pPr algn="l">
+              <a:spcAft>
+                <a:spcPts val="0"/>
+              </a:spcAft>
+            </a:pPr>
+            <a:r>
+              <a:rPr sz="1250" b="1" i="0">
+                <a:solidFill>
+                  <a:srgbClr val="E7F0F3"/>
+                </a:solidFill>
+                <a:latin typeface="Arial"/>
+              </a:rPr>
+              <a:t>1.53e+04 ns</a:t>
+            </a:r>
+          </a:p>
+        </p:txBody>
+      </p:sp>
+      <p:sp>
+        <p:nvSpPr>
+          <p:cNvPr id="10" name="C4-E10 text 8" descr="sci-ppt:o008"/>
+          <p:cNvSpPr txBox="1"/>
+          <p:nvPr/>
+        </p:nvSpPr>
+        <p:spPr>
+          <a:xfrm>
+            <a:off x="457200" y="2944368"/>
+            <a:ext cx="4846320" cy="239395"/>
+          </a:xfrm>
+          <a:prstGeom prst="rect">
+            <a:avLst/>
+          </a:prstGeom>
+          <a:noFill/>
+          <a:effectLst/>
+        </p:spPr>
+        <p:txBody>
+          <a:bodyPr wrap="none" lIns="18288" rIns="18288" tIns="18288" bIns="18288" anchor="t">
+            <a:spAutoFit/>
+          </a:bodyPr>
+          <a:lstStyle/>
+          <a:p>
+            <a:pPr algn="l">
+              <a:spcAft>
+                <a:spcPts val="0"/>
+              </a:spcAft>
+            </a:pPr>
+            <a:r>
+              <a:rPr sz="1250" b="0" i="0">
+                <a:solidFill>
+                  <a:srgbClr val="E7F0F3"/>
+                </a:solidFill>
+                <a:latin typeface="Arial"/>
+              </a:rPr>
+              <a:t>tₙ = √(m_A/Kₙ)  (cohesive, Kₙ = 10¹³ Pa/m)</a:t>
+            </a:r>
+          </a:p>
+        </p:txBody>
+      </p:sp>
+      <p:sp>
+        <p:nvSpPr>
+          <p:cNvPr id="11" name="C4-E10 rect 9" descr="sci-ppt:o009"/>
+          <p:cNvSpPr/>
+          <p:nvPr/>
+        </p:nvSpPr>
+        <p:spPr>
+          <a:xfrm>
+            <a:off x="5394960" y="2926080"/>
+            <a:ext cx="1411258" cy="457200"/>
+          </a:xfrm>
+          <a:prstGeom prst="rect">
+            <a:avLst/>
+          </a:prstGeom>
+          <a:solidFill>
+            <a:srgbClr val="F28BA0">
+              <a:alpha val="85000"/>
+            </a:srgbClr>
+          </a:solidFill>
+          <a:ln w="12700">
+            <a:solidFill>
+              <a:srgbClr val="F28BA0">
+                <a:alpha val="85000"/>
+              </a:srgbClr>
+            </a:solidFill>
+          </a:ln>
+          <a:effectLst/>
+        </p:spPr>
+        <p:txBody>
+          <a:bodyPr rtlCol="0" anchor="ctr"/>
+          <a:lstStyle/>
+          <a:p>
+            <a:pPr algn="ctr"/>
+          </a:p>
+        </p:txBody>
+      </p:sp>
+      <p:sp>
+        <p:nvSpPr>
+          <p:cNvPr id="12" name="C4-E10 text 10" descr="sci-ppt:o010"/>
+          <p:cNvSpPr txBox="1"/>
+          <p:nvPr/>
+        </p:nvSpPr>
+        <p:spPr>
+          <a:xfrm>
+            <a:off x="6879370" y="2971800"/>
+            <a:ext cx="1371600" cy="239395"/>
+          </a:xfrm>
+          <a:prstGeom prst="rect">
+            <a:avLst/>
+          </a:prstGeom>
+          <a:noFill/>
+          <a:effectLst/>
+        </p:spPr>
+        <p:txBody>
+          <a:bodyPr wrap="none" lIns="18288" rIns="18288" tIns="18288" bIns="18288" anchor="t">
+            <a:spAutoFit/>
+          </a:bodyPr>
+          <a:lstStyle/>
+          <a:p>
+            <a:pPr algn="l">
+              <a:spcAft>
+                <a:spcPts val="0"/>
+              </a:spcAft>
+            </a:pPr>
+            <a:r>
+              <a:rPr sz="1250" b="1" i="0">
+                <a:solidFill>
+                  <a:srgbClr val="E7F0F3"/>
+                </a:solidFill>
+                <a:latin typeface="Arial"/>
+              </a:rPr>
+              <a:t>48.3 ns</a:t>
+            </a:r>
+          </a:p>
+        </p:txBody>
+      </p:sp>
+      <p:sp>
+        <p:nvSpPr>
+          <p:cNvPr id="13" name="C4-E10 text 11" descr="sci-ppt:o011"/>
+          <p:cNvSpPr txBox="1"/>
+          <p:nvPr/>
+        </p:nvSpPr>
+        <p:spPr>
+          <a:xfrm>
+            <a:off x="457200" y="3675887"/>
+            <a:ext cx="4846320" cy="239395"/>
+          </a:xfrm>
+          <a:prstGeom prst="rect">
+            <a:avLst/>
+          </a:prstGeom>
+          <a:noFill/>
+          <a:effectLst/>
+        </p:spPr>
+        <p:txBody>
+          <a:bodyPr wrap="none" lIns="18288" rIns="18288" tIns="18288" bIns="18288" anchor="t">
+            <a:spAutoFit/>
+          </a:bodyPr>
+          <a:lstStyle/>
+          <a:p>
+            <a:pPr algn="l">
+              <a:spcAft>
+                <a:spcPts val="0"/>
+              </a:spcAft>
+            </a:pPr>
+            <a:r>
+              <a:rPr sz="1250" b="0" i="0">
+                <a:solidFill>
+                  <a:srgbClr val="E7F0F3"/>
+                </a:solidFill>
+                <a:latin typeface="Arial"/>
+              </a:rPr>
+              <a:t>impulse-equivalent pulse τ_eq</a:t>
+            </a:r>
+          </a:p>
+        </p:txBody>
+      </p:sp>
+      <p:sp>
+        <p:nvSpPr>
+          <p:cNvPr id="14" name="C4-E10 rect 12" descr="sci-ppt:o012"/>
+          <p:cNvSpPr/>
+          <p:nvPr/>
+        </p:nvSpPr>
+        <p:spPr>
+          <a:xfrm>
+            <a:off x="5394960" y="3657600"/>
+            <a:ext cx="1281322" cy="457200"/>
+          </a:xfrm>
+          <a:prstGeom prst="rect">
+            <a:avLst/>
+          </a:prstGeom>
+          <a:solidFill>
+            <a:srgbClr val="8EDBD4">
+              <a:alpha val="85000"/>
+            </a:srgbClr>
+          </a:solidFill>
+          <a:ln w="12700">
+            <a:solidFill>
+              <a:srgbClr val="8EDBD4">
+                <a:alpha val="85000"/>
+              </a:srgbClr>
+            </a:solidFill>
+          </a:ln>
+          <a:effectLst/>
+        </p:spPr>
+        <p:txBody>
+          <a:bodyPr rtlCol="0" anchor="ctr"/>
+          <a:lstStyle/>
+          <a:p>
+            <a:pPr algn="ctr"/>
+          </a:p>
+        </p:txBody>
+      </p:sp>
+      <p:sp>
+        <p:nvSpPr>
+          <p:cNvPr id="15" name="C4-E10 text 13" descr="sci-ppt:o013"/>
+          <p:cNvSpPr txBox="1"/>
+          <p:nvPr/>
+        </p:nvSpPr>
+        <p:spPr>
+          <a:xfrm>
+            <a:off x="6749434" y="3703320"/>
+            <a:ext cx="1371600" cy="239395"/>
+          </a:xfrm>
+          <a:prstGeom prst="rect">
+            <a:avLst/>
+          </a:prstGeom>
+          <a:noFill/>
+          <a:effectLst/>
+        </p:spPr>
+        <p:txBody>
+          <a:bodyPr wrap="none" lIns="18288" rIns="18288" tIns="18288" bIns="18288" anchor="t">
+            <a:spAutoFit/>
+          </a:bodyPr>
+          <a:lstStyle/>
+          <a:p>
+            <a:pPr algn="l">
+              <a:spcAft>
+                <a:spcPts val="0"/>
+              </a:spcAft>
+            </a:pPr>
+            <a:r>
+              <a:rPr sz="1250" b="1" i="0">
+                <a:solidFill>
+                  <a:srgbClr val="E7F0F3"/>
+                </a:solidFill>
+                <a:latin typeface="Arial"/>
+              </a:rPr>
+              <a:t>33.8 ns</a:t>
+            </a:r>
+          </a:p>
+        </p:txBody>
+      </p:sp>
+      <p:sp>
+        <p:nvSpPr>
+          <p:cNvPr id="16" name="C4-E10 round_rect 14" descr="sci-ppt:o014"/>
+          <p:cNvSpPr/>
+          <p:nvPr/>
+        </p:nvSpPr>
+        <p:spPr>
+          <a:xfrm>
+            <a:off x="457200" y="4572000"/>
+            <a:ext cx="5486400" cy="1371600"/>
+          </a:xfrm>
+          <a:prstGeom prst="roundRect">
             <a:avLst/>
           </a:prstGeom>
           <a:solidFill>
             <a:srgbClr val="213E4B"/>
           </a:solidFill>
-          <a:ln w="19050">
+          <a:ln w="20320">
             <a:solidFill>
-              <a:srgbClr val="B4C7D2"/>
+              <a:srgbClr val="8EDBD4"/>
             </a:solidFill>
           </a:ln>
           <a:effectLst/>
@@ -3170,14 +3674,14 @@
       </p:sp>
       <p:sp>
         <p:nvSpPr>
-          <p:cNvPr id="4" name="C4-E10 text 2" descr="sci-ppt:o002"/>
+          <p:cNvPr id="17" name="C4-E10 text 15" descr="sci-ppt:o015"/>
           <p:cNvSpPr txBox="1"/>
           <p:nvPr/>
         </p:nvSpPr>
         <p:spPr>
           <a:xfrm>
-            <a:off x="758952" y="1627632"/>
-            <a:ext cx="2871216" cy="914400"/>
+            <a:off x="566928" y="4626864"/>
+            <a:ext cx="5266944" cy="247142"/>
           </a:xfrm>
           <a:prstGeom prst="rect">
             <a:avLst/>
@@ -3186,7 +3690,7 @@
           <a:effectLst/>
         </p:spPr>
         <p:txBody>
-          <a:bodyPr wrap="square" lIns="27432" rIns="27432" tIns="18288" bIns="18288" anchor="ctr">
+          <a:bodyPr wrap="none" lIns="18288" rIns="18288" tIns="18288" bIns="18288" anchor="t">
             <a:spAutoFit/>
           </a:bodyPr>
           <a:lstStyle/>
@@ -3197,61 +3701,93 @@
               </a:spcAft>
             </a:pPr>
             <a:r>
-              <a:rPr sz="1800" b="0" i="0">
+              <a:rPr sz="1300" b="1" i="0">
+                <a:solidFill>
+                  <a:srgbClr val="8EDBD4"/>
+                </a:solidFill>
+                <a:latin typeface="Arial"/>
+              </a:rPr>
+              <a:t>Short pulse</a:t>
+            </a:r>
+          </a:p>
+        </p:txBody>
+      </p:sp>
+      <p:sp>
+        <p:nvSpPr>
+          <p:cNvPr id="18" name="C4-E10 text 16" descr="sci-ppt:o016"/>
+          <p:cNvSpPr txBox="1"/>
+          <p:nvPr/>
+        </p:nvSpPr>
+        <p:spPr>
+          <a:xfrm>
+            <a:off x="594360" y="4983480"/>
+            <a:ext cx="5212080" cy="417576"/>
+          </a:xfrm>
+          <a:prstGeom prst="rect">
+            <a:avLst/>
+          </a:prstGeom>
+          <a:noFill/>
+          <a:effectLst/>
+        </p:spPr>
+        <p:txBody>
+          <a:bodyPr wrap="none" lIns="18288" rIns="18288" tIns="18288" bIns="18288" anchor="t">
+            <a:spAutoFit/>
+          </a:bodyPr>
+          <a:lstStyle/>
+          <a:p>
+            <a:pPr algn="l">
+              <a:spcAft>
+                <a:spcPts val="0"/>
+              </a:spcAft>
+            </a:pPr>
+            <a:r>
+              <a:rPr sz="1200" b="0" i="0">
                 <a:solidFill>
                   <a:srgbClr val="E7F0F3"/>
                 </a:solidFill>
                 <a:latin typeface="Arial"/>
               </a:rPr>
-              <a:t>Bending: t_b,scale</a:t>
-            </a:r>
-          </a:p>
-        </p:txBody>
-      </p:sp>
-      <p:cxnSp>
-        <p:nvCxnSpPr>
-          <p:cNvPr id="5" name="C4-E10 arrow 3" descr="sci-ppt:o003"/>
-          <p:cNvCxnSpPr/>
-          <p:nvPr/>
-        </p:nvCxnSpPr>
-        <p:spPr>
-          <a:xfrm>
-            <a:off x="3794760" y="2057400"/>
-            <a:ext cx="640080" cy="0"/>
-          </a:xfrm>
-          <a:prstGeom prst="line">
-            <a:avLst/>
-          </a:prstGeom>
-          <a:ln w="25400">
-            <a:solidFill>
-              <a:srgbClr val="8EDBD4"/>
-            </a:solidFill>
-            <a:headEnd type="none" w="med" len="med"/>
-            <a:tailEnd type="triangle" w="med" len="med"/>
-          </a:ln>
-          <a:effectLst/>
-        </p:spPr>
-      </p:cxnSp>
-      <p:sp>
-        <p:nvSpPr>
-          <p:cNvPr id="6" name="C4-E10 rect 4" descr="sci-ppt:o004"/>
+              <a:t>τ ≪ response time: the film cannot react during the pulse, so it</a:t>
+            </a:r>
+          </a:p>
+          <a:p>
+            <a:pPr algn="l">
+              <a:spcAft>
+                <a:spcPts val="0"/>
+              </a:spcAft>
+            </a:pPr>
+            <a:r>
+              <a:rPr sz="1200" b="0" i="0">
+                <a:solidFill>
+                  <a:srgbClr val="E7F0F3"/>
+                </a:solidFill>
+                <a:latin typeface="Arial"/>
+              </a:rPr>
+              <a:t>gets a free velocity (Eq. C4-E09).</a:t>
+            </a:r>
+          </a:p>
+        </p:txBody>
+      </p:sp>
+      <p:sp>
+        <p:nvSpPr>
+          <p:cNvPr id="19" name="C4-E10 round_rect 17" descr="sci-ppt:o017"/>
           <p:cNvSpPr/>
           <p:nvPr/>
         </p:nvSpPr>
         <p:spPr>
           <a:xfrm>
-            <a:off x="4480560" y="1417320"/>
-            <a:ext cx="3200400" cy="1325880"/>
-          </a:xfrm>
-          <a:prstGeom prst="rect">
+            <a:off x="6217920" y="4572000"/>
+            <a:ext cx="5486400" cy="1371600"/>
+          </a:xfrm>
+          <a:prstGeom prst="roundRect">
             <a:avLst/>
           </a:prstGeom>
           <a:solidFill>
             <a:srgbClr val="213E4B"/>
           </a:solidFill>
-          <a:ln w="19050">
+          <a:ln w="20320">
             <a:solidFill>
-              <a:srgbClr val="B4C7D2"/>
+              <a:srgbClr val="F2B880"/>
             </a:solidFill>
           </a:ln>
           <a:effectLst/>
@@ -3266,14 +3802,14 @@
       </p:sp>
       <p:sp>
         <p:nvSpPr>
-          <p:cNvPr id="7" name="C4-E10 text 5" descr="sci-ppt:o005"/>
+          <p:cNvPr id="20" name="C4-E10 text 18" descr="sci-ppt:o018"/>
           <p:cNvSpPr txBox="1"/>
           <p:nvPr/>
         </p:nvSpPr>
         <p:spPr>
           <a:xfrm>
-            <a:off x="4645152" y="1627632"/>
-            <a:ext cx="2871216" cy="914400"/>
+            <a:off x="6327648" y="4626864"/>
+            <a:ext cx="5266944" cy="247142"/>
           </a:xfrm>
           <a:prstGeom prst="rect">
             <a:avLst/>
@@ -3282,7 +3818,7 @@
           <a:effectLst/>
         </p:spPr>
         <p:txBody>
-          <a:bodyPr wrap="square" lIns="27432" rIns="27432" tIns="18288" bIns="18288" anchor="ctr">
+          <a:bodyPr wrap="none" lIns="18288" rIns="18288" tIns="18288" bIns="18288" anchor="t">
             <a:spAutoFit/>
           </a:bodyPr>
           <a:lstStyle/>
@@ -3293,83 +3829,83 @@
               </a:spcAft>
             </a:pPr>
             <a:r>
-              <a:rPr sz="1800" b="0" i="0">
+              <a:rPr sz="1300" b="1" i="0">
+                <a:solidFill>
+                  <a:srgbClr val="F2B880"/>
+                </a:solidFill>
+                <a:latin typeface="Arial"/>
+              </a:rPr>
+              <a:t>Long pulse</a:t>
+            </a:r>
+          </a:p>
+        </p:txBody>
+      </p:sp>
+      <p:sp>
+        <p:nvSpPr>
+          <p:cNvPr id="21" name="C4-E10 text 19" descr="sci-ppt:o019"/>
+          <p:cNvSpPr txBox="1"/>
+          <p:nvPr/>
+        </p:nvSpPr>
+        <p:spPr>
+          <a:xfrm>
+            <a:off x="6355080" y="4983480"/>
+            <a:ext cx="5212080" cy="417576"/>
+          </a:xfrm>
+          <a:prstGeom prst="rect">
+            <a:avLst/>
+          </a:prstGeom>
+          <a:noFill/>
+          <a:effectLst/>
+        </p:spPr>
+        <p:txBody>
+          <a:bodyPr wrap="none" lIns="18288" rIns="18288" tIns="18288" bIns="18288" anchor="t">
+            <a:spAutoFit/>
+          </a:bodyPr>
+          <a:lstStyle/>
+          <a:p>
+            <a:pPr algn="l">
+              <a:spcAft>
+                <a:spcPts val="0"/>
+              </a:spcAft>
+            </a:pPr>
+            <a:r>
+              <a:rPr sz="1200" b="0" i="0">
                 <a:solidFill>
                   <a:srgbClr val="E7F0F3"/>
                 </a:solidFill>
                 <a:latin typeface="Arial"/>
               </a:rPr>
-              <a:t>Pretension: t_T,scale</a:t>
-            </a:r>
-          </a:p>
-        </p:txBody>
-      </p:sp>
-      <p:cxnSp>
-        <p:nvCxnSpPr>
-          <p:cNvPr id="8" name="C4-E10 arrow 6" descr="sci-ppt:o006"/>
-          <p:cNvCxnSpPr/>
-          <p:nvPr/>
-        </p:nvCxnSpPr>
-        <p:spPr>
-          <a:xfrm>
-            <a:off x="7680960" y="2057400"/>
-            <a:ext cx="640080" cy="0"/>
-          </a:xfrm>
-          <a:prstGeom prst="line">
-            <a:avLst/>
-          </a:prstGeom>
-          <a:ln w="25400">
-            <a:solidFill>
-              <a:srgbClr val="8EDBD4"/>
-            </a:solidFill>
-            <a:headEnd type="none" w="med" len="med"/>
-            <a:tailEnd type="triangle" w="med" len="med"/>
-          </a:ln>
-          <a:effectLst/>
-        </p:spPr>
-      </p:cxnSp>
-      <p:sp>
-        <p:nvSpPr>
-          <p:cNvPr id="9" name="C4-E10 rect 7" descr="sci-ppt:o007"/>
-          <p:cNvSpPr/>
-          <p:nvPr/>
-        </p:nvSpPr>
-        <p:spPr>
-          <a:xfrm>
-            <a:off x="8366760" y="1417320"/>
-            <a:ext cx="3200400" cy="1325880"/>
-          </a:xfrm>
-          <a:prstGeom prst="rect">
-            <a:avLst/>
-          </a:prstGeom>
-          <a:solidFill>
-            <a:srgbClr val="213E4B"/>
-          </a:solidFill>
-          <a:ln w="19050">
-            <a:solidFill>
-              <a:srgbClr val="B4C7D2"/>
-            </a:solidFill>
-          </a:ln>
-          <a:effectLst/>
-        </p:spPr>
-        <p:txBody>
-          <a:bodyPr rtlCol="0" anchor="ctr"/>
-          <a:lstStyle/>
-          <a:p>
-            <a:pPr algn="ctr"/>
-          </a:p>
-        </p:txBody>
-      </p:sp>
-      <p:sp>
-        <p:nvSpPr>
-          <p:cNvPr id="10" name="C4-E10 text 8" descr="sci-ppt:o008"/>
+              <a:t>τ ≳ response time: elastic and cohesive reactions act during the</a:t>
+            </a:r>
+          </a:p>
+          <a:p>
+            <a:pPr algn="l">
+              <a:spcAft>
+                <a:spcPts val="0"/>
+              </a:spcAft>
+            </a:pPr>
+            <a:r>
+              <a:rPr sz="1200" b="0" i="0">
+                <a:solidFill>
+                  <a:srgbClr val="E7F0F3"/>
+                </a:solidFill>
+                <a:latin typeface="Arial"/>
+              </a:rPr>
+              <a:t>pulse and reduce the net impulse.</a:t>
+            </a:r>
+          </a:p>
+        </p:txBody>
+      </p:sp>
+      <p:sp>
+        <p:nvSpPr>
+          <p:cNvPr id="22" name="C4-E10 text 20" descr="sci-ppt:o020"/>
           <p:cNvSpPr txBox="1"/>
           <p:nvPr/>
         </p:nvSpPr>
         <p:spPr>
           <a:xfrm>
-            <a:off x="8531352" y="1627632"/>
-            <a:ext cx="2871216" cy="914400"/>
+            <a:off x="320040" y="6510528"/>
+            <a:ext cx="11521440" cy="200660"/>
           </a:xfrm>
           <a:prstGeom prst="rect">
             <a:avLst/>
@@ -3378,389 +3914,7 @@
           <a:effectLst/>
         </p:spPr>
         <p:txBody>
-          <a:bodyPr wrap="square" lIns="27432" rIns="27432" tIns="18288" bIns="18288" anchor="ctr">
-            <a:spAutoFit/>
-          </a:bodyPr>
-          <a:lstStyle/>
-          <a:p>
-            <a:pPr algn="l">
-              <a:spcAft>
-                <a:spcPts val="0"/>
-              </a:spcAft>
-            </a:pPr>
-            <a:r>
-              <a:rPr sz="1800" b="0" i="0">
-                <a:solidFill>
-                  <a:srgbClr val="E7F0F3"/>
-                </a:solidFill>
-                <a:latin typeface="Arial"/>
-              </a:rPr>
-              <a:t>Cohesion: t_n,scale</a:t>
-            </a:r>
-          </a:p>
-        </p:txBody>
-      </p:sp>
-      <p:sp>
-        <p:nvSpPr>
-          <p:cNvPr id="11" name="C4-E10 text 9" descr="sci-ppt:o009"/>
-          <p:cNvSpPr txBox="1"/>
-          <p:nvPr/>
-        </p:nvSpPr>
-        <p:spPr>
-          <a:xfrm>
-            <a:off x="731520" y="3246120"/>
-            <a:ext cx="10789920" cy="457200"/>
-          </a:xfrm>
-          <a:prstGeom prst="rect">
-            <a:avLst/>
-          </a:prstGeom>
-          <a:noFill/>
-          <a:effectLst/>
-        </p:spPr>
-        <p:txBody>
-          <a:bodyPr wrap="square" lIns="27432" rIns="27432" tIns="18288" bIns="18288" anchor="ctr">
-            <a:spAutoFit/>
-          </a:bodyPr>
-          <a:lstStyle/>
-          <a:p>
-            <a:pPr algn="l">
-              <a:spcAft>
-                <a:spcPts val="0"/>
-              </a:spcAft>
-            </a:pPr>
-            <a:r>
-              <a:rPr sz="1800" b="0" i="0">
-                <a:solidFill>
-                  <a:srgbClr val="8EDBD4"/>
-                </a:solidFill>
-                <a:latin typeface="Arial"/>
-              </a:rPr>
-              <a:t>Compare actual pulse duration with each applicable response time.</a:t>
-            </a:r>
-          </a:p>
-        </p:txBody>
-      </p:sp>
-      <p:cxnSp>
-        <p:nvCxnSpPr>
-          <p:cNvPr id="12" name="C4-E10 line 10" descr="sci-ppt:o010"/>
-          <p:cNvCxnSpPr/>
-          <p:nvPr/>
-        </p:nvCxnSpPr>
-        <p:spPr>
-          <a:xfrm>
-            <a:off x="274320" y="3977639"/>
-            <a:ext cx="11612880" cy="0"/>
-          </a:xfrm>
-          <a:prstGeom prst="line">
-            <a:avLst/>
-          </a:prstGeom>
-          <a:ln w="12700">
-            <a:solidFill>
-              <a:srgbClr val="405967"/>
-            </a:solidFill>
-          </a:ln>
-          <a:effectLst/>
-        </p:spPr>
-      </p:cxnSp>
-      <p:sp>
-        <p:nvSpPr>
-          <p:cNvPr id="13" name="C4-E10 text 11" descr="sci-ppt:o011"/>
-          <p:cNvSpPr txBox="1"/>
-          <p:nvPr/>
-        </p:nvSpPr>
-        <p:spPr>
-          <a:xfrm>
-            <a:off x="320040" y="4096512"/>
-            <a:ext cx="5715000" cy="246888"/>
-          </a:xfrm>
-          <a:prstGeom prst="rect">
-            <a:avLst/>
-          </a:prstGeom>
-          <a:noFill/>
-          <a:effectLst/>
-        </p:spPr>
-        <p:txBody>
-          <a:bodyPr wrap="square" lIns="27432" rIns="27432" tIns="18288" bIns="18288" anchor="ctr">
-            <a:spAutoFit/>
-          </a:bodyPr>
-          <a:lstStyle/>
-          <a:p>
-            <a:pPr algn="l">
-              <a:spcAft>
-                <a:spcPts val="0"/>
-              </a:spcAft>
-            </a:pPr>
-            <a:r>
-              <a:rPr sz="1150" b="0" i="0">
-                <a:solidFill>
-                  <a:srgbClr val="B4C7D2"/>
-                </a:solidFill>
-                <a:latin typeface="Arial"/>
-              </a:rPr>
-              <a:t>• a_f — lateral deformation length</a:t>
-            </a:r>
-          </a:p>
-        </p:txBody>
-      </p:sp>
-      <p:sp>
-        <p:nvSpPr>
-          <p:cNvPr id="14" name="C4-E10 text 12" descr="sci-ppt:o012"/>
-          <p:cNvSpPr txBox="1"/>
-          <p:nvPr/>
-        </p:nvSpPr>
-        <p:spPr>
-          <a:xfrm>
-            <a:off x="6217920" y="4096512"/>
-            <a:ext cx="5715000" cy="246888"/>
-          </a:xfrm>
-          <a:prstGeom prst="rect">
-            <a:avLst/>
-          </a:prstGeom>
-          <a:noFill/>
-          <a:effectLst/>
-        </p:spPr>
-        <p:txBody>
-          <a:bodyPr wrap="square" lIns="27432" rIns="27432" tIns="18288" bIns="18288" anchor="ctr">
-            <a:spAutoFit/>
-          </a:bodyPr>
-          <a:lstStyle/>
-          <a:p>
-            <a:pPr algn="l">
-              <a:spcAft>
-                <a:spcPts val="0"/>
-              </a:spcAft>
-            </a:pPr>
-            <a:r>
-              <a:rPr sz="1150" b="0" i="0">
-                <a:solidFill>
-                  <a:srgbClr val="B4C7D2"/>
-                </a:solidFill>
-                <a:latin typeface="Arial"/>
-              </a:rPr>
-              <a:t>• m_A — inertia</a:t>
-            </a:r>
-          </a:p>
-        </p:txBody>
-      </p:sp>
-      <p:sp>
-        <p:nvSpPr>
-          <p:cNvPr id="15" name="C4-E10 text 13" descr="sci-ppt:o013"/>
-          <p:cNvSpPr txBox="1"/>
-          <p:nvPr/>
-        </p:nvSpPr>
-        <p:spPr>
-          <a:xfrm>
-            <a:off x="320040" y="4329684"/>
-            <a:ext cx="5715000" cy="246888"/>
-          </a:xfrm>
-          <a:prstGeom prst="rect">
-            <a:avLst/>
-          </a:prstGeom>
-          <a:noFill/>
-          <a:effectLst/>
-        </p:spPr>
-        <p:txBody>
-          <a:bodyPr wrap="square" lIns="27432" rIns="27432" tIns="18288" bIns="18288" anchor="ctr">
-            <a:spAutoFit/>
-          </a:bodyPr>
-          <a:lstStyle/>
-          <a:p>
-            <a:pPr algn="l">
-              <a:spcAft>
-                <a:spcPts val="0"/>
-              </a:spcAft>
-            </a:pPr>
-            <a:r>
-              <a:rPr sz="1150" b="0" i="0">
-                <a:solidFill>
-                  <a:srgbClr val="B4C7D2"/>
-                </a:solidFill>
-                <a:latin typeface="Arial"/>
-              </a:rPr>
-              <a:t>• D_f → t_b,scale</a:t>
-            </a:r>
-          </a:p>
-        </p:txBody>
-      </p:sp>
-      <p:sp>
-        <p:nvSpPr>
-          <p:cNvPr id="16" name="C4-E10 text 14" descr="sci-ppt:o014"/>
-          <p:cNvSpPr txBox="1"/>
-          <p:nvPr/>
-        </p:nvSpPr>
-        <p:spPr>
-          <a:xfrm>
-            <a:off x="6217920" y="4329684"/>
-            <a:ext cx="5715000" cy="246888"/>
-          </a:xfrm>
-          <a:prstGeom prst="rect">
-            <a:avLst/>
-          </a:prstGeom>
-          <a:noFill/>
-          <a:effectLst/>
-        </p:spPr>
-        <p:txBody>
-          <a:bodyPr wrap="square" lIns="27432" rIns="27432" tIns="18288" bIns="18288" anchor="ctr">
-            <a:spAutoFit/>
-          </a:bodyPr>
-          <a:lstStyle/>
-          <a:p>
-            <a:pPr algn="l">
-              <a:spcAft>
-                <a:spcPts val="0"/>
-              </a:spcAft>
-            </a:pPr>
-            <a:r>
-              <a:rPr sz="1150" b="0" i="0">
-                <a:solidFill>
-                  <a:srgbClr val="B4C7D2"/>
-                </a:solidFill>
-                <a:latin typeface="Arial"/>
-              </a:rPr>
-              <a:t>• T₀ → t_T,scale</a:t>
-            </a:r>
-          </a:p>
-        </p:txBody>
-      </p:sp>
-      <p:sp>
-        <p:nvSpPr>
-          <p:cNvPr id="17" name="C4-E10 text 15" descr="sci-ppt:o015"/>
-          <p:cNvSpPr txBox="1"/>
-          <p:nvPr/>
-        </p:nvSpPr>
-        <p:spPr>
-          <a:xfrm>
-            <a:off x="320040" y="4562856"/>
-            <a:ext cx="5715000" cy="246888"/>
-          </a:xfrm>
-          <a:prstGeom prst="rect">
-            <a:avLst/>
-          </a:prstGeom>
-          <a:noFill/>
-          <a:effectLst/>
-        </p:spPr>
-        <p:txBody>
-          <a:bodyPr wrap="square" lIns="27432" rIns="27432" tIns="18288" bIns="18288" anchor="ctr">
-            <a:spAutoFit/>
-          </a:bodyPr>
-          <a:lstStyle/>
-          <a:p>
-            <a:pPr algn="l">
-              <a:spcAft>
-                <a:spcPts val="0"/>
-              </a:spcAft>
-            </a:pPr>
-            <a:r>
-              <a:rPr sz="1150" b="0" i="0">
-                <a:solidFill>
-                  <a:srgbClr val="B4C7D2"/>
-                </a:solidFill>
-                <a:latin typeface="Arial"/>
-              </a:rPr>
-              <a:t>• K_n → t_n,scale</a:t>
-            </a:r>
-          </a:p>
-        </p:txBody>
-      </p:sp>
-      <p:sp>
-        <p:nvSpPr>
-          <p:cNvPr id="18" name="C4-E10 text 16" descr="sci-ppt:o016"/>
-          <p:cNvSpPr txBox="1"/>
-          <p:nvPr/>
-        </p:nvSpPr>
-        <p:spPr>
-          <a:xfrm>
-            <a:off x="6217920" y="4562856"/>
-            <a:ext cx="5715000" cy="246888"/>
-          </a:xfrm>
-          <a:prstGeom prst="rect">
-            <a:avLst/>
-          </a:prstGeom>
-          <a:noFill/>
-          <a:effectLst/>
-        </p:spPr>
-        <p:txBody>
-          <a:bodyPr wrap="square" lIns="27432" rIns="27432" tIns="18288" bIns="18288" anchor="ctr">
-            <a:spAutoFit/>
-          </a:bodyPr>
-          <a:lstStyle/>
-          <a:p>
-            <a:pPr algn="l">
-              <a:spcAft>
-                <a:spcPts val="0"/>
-              </a:spcAft>
-            </a:pPr>
-            <a:r>
-              <a:rPr sz="1150" b="0" i="0">
-                <a:solidFill>
-                  <a:srgbClr val="B4C7D2"/>
-                </a:solidFill>
-                <a:latin typeface="Arial"/>
-              </a:rPr>
-              <a:t>• pulse duration → compare response times</a:t>
-            </a:r>
-          </a:p>
-        </p:txBody>
-      </p:sp>
-      <p:sp>
-        <p:nvSpPr>
-          <p:cNvPr id="19" name="C4-E10 text 17" descr="sci-ppt:o017"/>
-          <p:cNvSpPr txBox="1"/>
-          <p:nvPr/>
-        </p:nvSpPr>
-        <p:spPr>
-          <a:xfrm>
-            <a:off x="320040" y="5596128"/>
-            <a:ext cx="11430000" cy="292608"/>
-          </a:xfrm>
-          <a:prstGeom prst="rect">
-            <a:avLst/>
-          </a:prstGeom>
-          <a:noFill/>
-          <a:effectLst/>
-        </p:spPr>
-        <p:txBody>
-          <a:bodyPr wrap="square" lIns="27432" rIns="27432" tIns="18288" bIns="18288" anchor="ctr">
-            <a:spAutoFit/>
-          </a:bodyPr>
-          <a:lstStyle/>
-          <a:p>
-            <a:pPr algn="l">
-              <a:spcAft>
-                <a:spcPts val="0"/>
-              </a:spcAft>
-            </a:pPr>
-            <a:r>
-              <a:rPr sz="1150" b="0" i="0">
-                <a:solidFill>
-                  <a:srgbClr val="8EDBD4"/>
-                </a:solidFill>
-                <a:latin typeface="Arial"/>
-              </a:rPr>
-              <a:t>PVC also has a finite through-thickness wave time.</a:t>
-            </a:r>
-          </a:p>
-        </p:txBody>
-      </p:sp>
-      <p:sp>
-        <p:nvSpPr>
-          <p:cNvPr id="20" name="C4-E10 text 18" descr="sci-ppt:o018"/>
-          <p:cNvSpPr txBox="1"/>
-          <p:nvPr/>
-        </p:nvSpPr>
-        <p:spPr>
-          <a:xfrm>
-            <a:off x="320040" y="6473952"/>
-            <a:ext cx="11430000" cy="256032"/>
-          </a:xfrm>
-          <a:prstGeom prst="rect">
-            <a:avLst/>
-          </a:prstGeom>
-          <a:noFill/>
-          <a:effectLst/>
-        </p:spPr>
-        <p:txBody>
-          <a:bodyPr wrap="square" lIns="27432" rIns="27432" tIns="18288" bIns="18288" anchor="ctr">
+          <a:bodyPr wrap="none" lIns="18288" rIns="18288" tIns="18288" bIns="18288" anchor="t">
             <a:spAutoFit/>
           </a:bodyPr>
           <a:lstStyle/>
@@ -3777,7 +3931,7 @@
                 </a:solidFill>
                 <a:latin typeface="Arial"/>
               </a:rPr>
-              <a:t>Model schematic; geometry is not to scale.</a:t>
+              <a:t>Term-balance times of Eq. C4-E10 for a_f = 100 µm, h_f = 10 µm (E_f = 2 GPa, ν = 0.35); T₀ and Kₙ are illustrative.</a:t>
             </a:r>
           </a:p>
         </p:txBody>
